--- a/docs/links-26/presentations/Second-Nature-for-managers.pptx
+++ b/docs/links-26/presentations/Second-Nature-for-managers.pptx
@@ -1546,7 +1546,7 @@
           <a:p>
             <a:r>
               <a:rPr lang="en-US" dirty="0"/>
-              <a:t>Days at work stay at 219 a year (218.6 exactly; Monday to Saturday; Sunday is overtime), under the ceiling agreed on 1 October 2026. Late finishes average about three more a year each, all of them from the December staffing — three to the close every day, where today’s weekdays have two — so no link meeting the same rules on 26 weeks could have fewer. Full weekends off fall unevenly: seven in 26, but up to ten weeks apart. The average shift is two minutes longer.</a:t>
+              <a:t>Days at work stay at 219 a year (218.6 exactly; Monday to Saturday; Sunday is overtime), under the ceiling agreed on 1 October 2026. Late finishes average about three more a year each, all of them from the December staffing — three to the close every day, where today’s weekdays have two — so no link meeting the same rules on 26 weeks could have fewer. Full weekends off fall unevenly: seven in 26, but up to ten weeks apart. The average shift is about two minutes longer.</a:t>
             </a:r>
             <a:endParaRPr lang="en-US" dirty="0"/>
           </a:p>
